--- a/preview/secteur_Energy_S&P_500/secteur_Energy_S&P_500.pptx
+++ b/preview/secteur_Energy_S&P_500/secteur_Energy_S&P_500.pptx
@@ -21882,7 +21882,7 @@
         <p:spPr>
           <a:xfrm>
             <a:off x="324000" y="827999"/>
-            <a:ext cx="5400000" cy="3671999"/>
+            <a:ext cx="5940000" cy="3671999"/>
           </a:xfrm>
           <a:prstGeom prst="rect">
             <a:avLst/>
@@ -21897,8 +21897,8 @@
         </p:nvSpPr>
         <p:spPr>
           <a:xfrm>
-            <a:off x="5903999" y="827999"/>
-            <a:ext cx="2916000" cy="3671999"/>
+            <a:off x="6336000" y="827999"/>
+            <a:ext cx="2448000" cy="3671999"/>
           </a:xfrm>
           <a:prstGeom prst="rect">
             <a:avLst/>
@@ -21940,8 +21940,8 @@
         </p:nvSpPr>
         <p:spPr>
           <a:xfrm>
-            <a:off x="5903999" y="827999"/>
-            <a:ext cx="2916000" cy="234000"/>
+            <a:off x="6336000" y="827999"/>
+            <a:ext cx="2448000" cy="234000"/>
           </a:xfrm>
           <a:prstGeom prst="rect">
             <a:avLst/>
@@ -21983,8 +21983,8 @@
         </p:nvSpPr>
         <p:spPr>
           <a:xfrm>
-            <a:off x="5976000" y="846000"/>
-            <a:ext cx="2808000" cy="198000"/>
+            <a:off x="6408000" y="846000"/>
+            <a:ext cx="2340000" cy="198000"/>
           </a:xfrm>
           <a:prstGeom prst="rect">
             <a:avLst/>
@@ -22004,64 +22004,21 @@
                   <a:srgbClr val="FFFFFF"/>
                 </a:solidFill>
               </a:rPr>
-              <a:t>LEGENDE — SOCIETES</a:t>
-            </a:r>
-          </a:p>
-        </p:txBody>
-      </p:sp>
-      <p:sp>
-        <p:nvSpPr>
-          <p:cNvPr id="19" name="Rectangle 18"/>
-          <p:cNvSpPr/>
-          <p:nvPr/>
-        </p:nvSpPr>
-        <p:spPr>
-          <a:xfrm>
-            <a:off x="5940000" y="1177200"/>
-            <a:ext cx="180000" cy="108000"/>
-          </a:xfrm>
-          <a:prstGeom prst="rect">
-            <a:avLst/>
-          </a:prstGeom>
-          <a:solidFill>
-            <a:srgbClr val="1B3A6B"/>
-          </a:solidFill>
-          <a:ln>
-            <a:noFill/>
-          </a:ln>
-        </p:spPr>
-        <p:style>
-          <a:lnRef idx="1">
-            <a:schemeClr val="accent1"/>
-          </a:lnRef>
-          <a:fillRef idx="3">
-            <a:schemeClr val="accent1"/>
-          </a:fillRef>
-          <a:effectRef idx="2">
-            <a:schemeClr val="accent1"/>
-          </a:effectRef>
-          <a:fontRef idx="minor">
-            <a:schemeClr val="lt1"/>
-          </a:fontRef>
-        </p:style>
-        <p:txBody>
-          <a:bodyPr rtlCol="0" anchor="ctr"/>
-          <a:lstStyle/>
-          <a:p>
-            <a:pPr algn="ctr"/>
-          </a:p>
-        </p:txBody>
-      </p:sp>
-      <p:sp>
-        <p:nvSpPr>
-          <p:cNvPr id="20" name="TextBox 19"/>
+              <a:t>LECTURE ANALYTIQUE</a:t>
+            </a:r>
+          </a:p>
+        </p:txBody>
+      </p:sp>
+      <p:sp>
+        <p:nvSpPr>
+          <p:cNvPr id="19" name="TextBox 18"/>
           <p:cNvSpPr txBox="1"/>
           <p:nvPr/>
         </p:nvSpPr>
         <p:spPr>
           <a:xfrm>
-            <a:off x="6192000" y="1134000"/>
-            <a:ext cx="2556000" cy="216000"/>
+            <a:off x="6408000" y="1152000"/>
+            <a:ext cx="2304000" cy="324000"/>
           </a:xfrm>
           <a:prstGeom prst="rect">
             <a:avLst/>
@@ -22076,26 +22033,26 @@
           <a:p>
             <a:pPr algn="l"/>
             <a:r>
-              <a:rPr sz="900" b="1" i="0">
+              <a:rPr sz="700" b="1" i="0">
                 <a:solidFill>
                   <a:srgbClr val="1B3A6B"/>
                 </a:solidFill>
               </a:rPr>
-              <a:t>XOM  —  Exxon Mobil Corporation</a:t>
-            </a:r>
-          </a:p>
-        </p:txBody>
-      </p:sp>
-      <p:sp>
-        <p:nvSpPr>
-          <p:cNvPr id="21" name="TextBox 20"/>
+              <a:t>MEILLEURE PERFORMANCE</a:t>
+            </a:r>
+          </a:p>
+        </p:txBody>
+      </p:sp>
+      <p:sp>
+        <p:nvSpPr>
+          <p:cNvPr id="20" name="TextBox 19"/>
           <p:cNvSpPr txBox="1"/>
           <p:nvPr/>
         </p:nvSpPr>
         <p:spPr>
           <a:xfrm>
-            <a:off x="6192000" y="1357200"/>
-            <a:ext cx="2556000" cy="180000"/>
+            <a:off x="6408000" y="1314000"/>
+            <a:ext cx="2304000" cy="324000"/>
           </a:xfrm>
           <a:prstGeom prst="rect">
             <a:avLst/>
@@ -22110,69 +22067,26 @@
           <a:p>
             <a:pPr algn="l"/>
             <a:r>
-              <a:rPr sz="800" b="0" i="0">
-                <a:solidFill>
-                  <a:srgbClr val="555555"/>
+              <a:rPr sz="900" b="1" i="0">
+                <a:solidFill>
+                  <a:srgbClr val="1B3A6B"/>
                 </a:solidFill>
               </a:rPr>
-              <a:t>Score 58/100  ·  HOLD</a:t>
-            </a:r>
-          </a:p>
-        </p:txBody>
-      </p:sp>
-      <p:sp>
-        <p:nvSpPr>
-          <p:cNvPr id="22" name="Rectangle 21"/>
-          <p:cNvSpPr/>
-          <p:nvPr/>
-        </p:nvSpPr>
-        <p:spPr>
-          <a:xfrm>
-            <a:off x="5940000" y="1507950"/>
-            <a:ext cx="180000" cy="108000"/>
-          </a:xfrm>
-          <a:prstGeom prst="rect">
-            <a:avLst/>
-          </a:prstGeom>
-          <a:solidFill>
-            <a:srgbClr val="1A7A4A"/>
-          </a:solidFill>
-          <a:ln>
-            <a:noFill/>
-          </a:ln>
-        </p:spPr>
-        <p:style>
-          <a:lnRef idx="1">
-            <a:schemeClr val="accent1"/>
-          </a:lnRef>
-          <a:fillRef idx="3">
-            <a:schemeClr val="accent1"/>
-          </a:fillRef>
-          <a:effectRef idx="2">
-            <a:schemeClr val="accent1"/>
-          </a:effectRef>
-          <a:fontRef idx="minor">
-            <a:schemeClr val="lt1"/>
-          </a:fontRef>
-        </p:style>
-        <p:txBody>
-          <a:bodyPr rtlCol="0" anchor="ctr"/>
-          <a:lstStyle/>
-          <a:p>
-            <a:pPr algn="ctr"/>
-          </a:p>
-        </p:txBody>
-      </p:sp>
-      <p:sp>
-        <p:nvSpPr>
-          <p:cNvPr id="23" name="TextBox 22"/>
+              <a:t>VLO  +82%  sur 52 semaines</a:t>
+            </a:r>
+          </a:p>
+        </p:txBody>
+      </p:sp>
+      <p:sp>
+        <p:nvSpPr>
+          <p:cNvPr id="21" name="TextBox 20"/>
           <p:cNvSpPr txBox="1"/>
           <p:nvPr/>
         </p:nvSpPr>
         <p:spPr>
           <a:xfrm>
-            <a:off x="6192000" y="1464749"/>
-            <a:ext cx="2556000" cy="216000"/>
+            <a:off x="6408000" y="1655999"/>
+            <a:ext cx="2304000" cy="324000"/>
           </a:xfrm>
           <a:prstGeom prst="rect">
             <a:avLst/>
@@ -22187,26 +22101,26 @@
           <a:p>
             <a:pPr algn="l"/>
             <a:r>
-              <a:rPr sz="900" b="1" i="0">
+              <a:rPr sz="700" b="1" i="0">
                 <a:solidFill>
                   <a:srgbClr val="1B3A6B"/>
                 </a:solidFill>
               </a:rPr>
-              <a:t>CVX  —  Chevron Corporation</a:t>
-            </a:r>
-          </a:p>
-        </p:txBody>
-      </p:sp>
-      <p:sp>
-        <p:nvSpPr>
-          <p:cNvPr id="24" name="TextBox 23"/>
+              <a:t>PIRE PERFORMANCE</a:t>
+            </a:r>
+          </a:p>
+        </p:txBody>
+      </p:sp>
+      <p:sp>
+        <p:nvSpPr>
+          <p:cNvPr id="22" name="TextBox 21"/>
           <p:cNvSpPr txBox="1"/>
           <p:nvPr/>
         </p:nvSpPr>
         <p:spPr>
           <a:xfrm>
-            <a:off x="6192000" y="1687950"/>
-            <a:ext cx="2556000" cy="180000"/>
+            <a:off x="6408000" y="1818000"/>
+            <a:ext cx="2304000" cy="324000"/>
           </a:xfrm>
           <a:prstGeom prst="rect">
             <a:avLst/>
@@ -22221,69 +22135,26 @@
           <a:p>
             <a:pPr algn="l"/>
             <a:r>
-              <a:rPr sz="800" b="0" i="0">
-                <a:solidFill>
-                  <a:srgbClr val="555555"/>
+              <a:rPr sz="900" b="1" i="0">
+                <a:solidFill>
+                  <a:srgbClr val="A82020"/>
                 </a:solidFill>
               </a:rPr>
-              <a:t>Score 44/100  ·  SELL</a:t>
-            </a:r>
-          </a:p>
-        </p:txBody>
-      </p:sp>
-      <p:sp>
-        <p:nvSpPr>
-          <p:cNvPr id="25" name="Rectangle 24"/>
-          <p:cNvSpPr/>
-          <p:nvPr/>
-        </p:nvSpPr>
-        <p:spPr>
-          <a:xfrm>
-            <a:off x="5940000" y="1838700"/>
-            <a:ext cx="180000" cy="108000"/>
-          </a:xfrm>
-          <a:prstGeom prst="rect">
-            <a:avLst/>
-          </a:prstGeom>
-          <a:solidFill>
-            <a:srgbClr val="A82020"/>
-          </a:solidFill>
-          <a:ln>
-            <a:noFill/>
-          </a:ln>
-        </p:spPr>
-        <p:style>
-          <a:lnRef idx="1">
-            <a:schemeClr val="accent1"/>
-          </a:lnRef>
-          <a:fillRef idx="3">
-            <a:schemeClr val="accent1"/>
-          </a:fillRef>
-          <a:effectRef idx="2">
-            <a:schemeClr val="accent1"/>
-          </a:effectRef>
-          <a:fontRef idx="minor">
-            <a:schemeClr val="lt1"/>
-          </a:fontRef>
-        </p:style>
-        <p:txBody>
-          <a:bodyPr rtlCol="0" anchor="ctr"/>
-          <a:lstStyle/>
-          <a:p>
-            <a:pPr algn="ctr"/>
-          </a:p>
-        </p:txBody>
-      </p:sp>
-      <p:sp>
-        <p:nvSpPr>
-          <p:cNvPr id="26" name="TextBox 25"/>
+              <a:t>EOG  +8%  sur 52 semaines</a:t>
+            </a:r>
+          </a:p>
+        </p:txBody>
+      </p:sp>
+      <p:sp>
+        <p:nvSpPr>
+          <p:cNvPr id="23" name="TextBox 22"/>
           <p:cNvSpPr txBox="1"/>
           <p:nvPr/>
         </p:nvSpPr>
         <p:spPr>
           <a:xfrm>
-            <a:off x="6192000" y="1795500"/>
-            <a:ext cx="2556000" cy="216000"/>
+            <a:off x="6408000" y="2196000"/>
+            <a:ext cx="2304000" cy="324000"/>
           </a:xfrm>
           <a:prstGeom prst="rect">
             <a:avLst/>
@@ -22298,26 +22169,26 @@
           <a:p>
             <a:pPr algn="l"/>
             <a:r>
-              <a:rPr sz="900" b="1" i="0">
+              <a:rPr sz="700" b="1" i="0">
                 <a:solidFill>
                   <a:srgbClr val="1B3A6B"/>
                 </a:solidFill>
               </a:rPr>
-              <a:t>COP  —  ConocoPhillips</a:t>
-            </a:r>
-          </a:p>
-        </p:txBody>
-      </p:sp>
-      <p:sp>
-        <p:nvSpPr>
-          <p:cNvPr id="27" name="TextBox 26"/>
+              <a:t>DISPERSION</a:t>
+            </a:r>
+          </a:p>
+        </p:txBody>
+      </p:sp>
+      <p:sp>
+        <p:nvSpPr>
+          <p:cNvPr id="24" name="TextBox 23"/>
           <p:cNvSpPr txBox="1"/>
           <p:nvPr/>
         </p:nvSpPr>
         <p:spPr>
           <a:xfrm>
-            <a:off x="6192000" y="2018700"/>
-            <a:ext cx="2556000" cy="180000"/>
+            <a:off x="6408000" y="2358000"/>
+            <a:ext cx="2304000" cy="324000"/>
           </a:xfrm>
           <a:prstGeom prst="rect">
             <a:avLst/>
@@ -22337,64 +22208,21 @@
                   <a:srgbClr val="555555"/>
                 </a:solidFill>
               </a:rPr>
-              <a:t>Score 56/100  ·  HOLD</a:t>
-            </a:r>
-          </a:p>
-        </p:txBody>
-      </p:sp>
-      <p:sp>
-        <p:nvSpPr>
-          <p:cNvPr id="28" name="Rectangle 27"/>
-          <p:cNvSpPr/>
-          <p:nvPr/>
-        </p:nvSpPr>
-        <p:spPr>
-          <a:xfrm>
-            <a:off x="5940000" y="2169450"/>
-            <a:ext cx="180000" cy="108000"/>
-          </a:xfrm>
-          <a:prstGeom prst="rect">
-            <a:avLst/>
-          </a:prstGeom>
-          <a:solidFill>
-            <a:srgbClr val="B06000"/>
-          </a:solidFill>
-          <a:ln>
-            <a:noFill/>
-          </a:ln>
-        </p:spPr>
-        <p:style>
-          <a:lnRef idx="1">
-            <a:schemeClr val="accent1"/>
-          </a:lnRef>
-          <a:fillRef idx="3">
-            <a:schemeClr val="accent1"/>
-          </a:fillRef>
-          <a:effectRef idx="2">
-            <a:schemeClr val="accent1"/>
-          </a:effectRef>
-          <a:fontRef idx="minor">
-            <a:schemeClr val="lt1"/>
-          </a:fontRef>
-        </p:style>
-        <p:txBody>
-          <a:bodyPr rtlCol="0" anchor="ctr"/>
-          <a:lstStyle/>
-          <a:p>
-            <a:pPr algn="ctr"/>
-          </a:p>
-        </p:txBody>
-      </p:sp>
-      <p:sp>
-        <p:nvSpPr>
-          <p:cNvPr id="29" name="TextBox 28"/>
+              <a:t>Ecart 74 pts — 8 valeur(s) positives vs 0 negatives.</a:t>
+            </a:r>
+          </a:p>
+        </p:txBody>
+      </p:sp>
+      <p:sp>
+        <p:nvSpPr>
+          <p:cNvPr id="25" name="TextBox 24"/>
           <p:cNvSpPr txBox="1"/>
           <p:nvPr/>
         </p:nvSpPr>
         <p:spPr>
           <a:xfrm>
-            <a:off x="6192000" y="2126250"/>
-            <a:ext cx="2556000" cy="216000"/>
+            <a:off x="6408000" y="2772000"/>
+            <a:ext cx="2304000" cy="324000"/>
           </a:xfrm>
           <a:prstGeom prst="rect">
             <a:avLst/>
@@ -22409,26 +22237,26 @@
           <a:p>
             <a:pPr algn="l"/>
             <a:r>
-              <a:rPr sz="900" b="1" i="0">
+              <a:rPr sz="700" b="1" i="0">
                 <a:solidFill>
                   <a:srgbClr val="1B3A6B"/>
                 </a:solidFill>
               </a:rPr>
-              <a:t>EOG  —  EOG Resources, Inc.</a:t>
-            </a:r>
-          </a:p>
-        </p:txBody>
-      </p:sp>
-      <p:sp>
-        <p:nvSpPr>
-          <p:cNvPr id="30" name="TextBox 29"/>
+              <a:t>INTERPRETATION</a:t>
+            </a:r>
+          </a:p>
+        </p:txBody>
+      </p:sp>
+      <p:sp>
+        <p:nvSpPr>
+          <p:cNvPr id="26" name="TextBox 25"/>
           <p:cNvSpPr txBox="1"/>
           <p:nvPr/>
         </p:nvSpPr>
         <p:spPr>
           <a:xfrm>
-            <a:off x="6192000" y="2349450"/>
-            <a:ext cx="2556000" cy="180000"/>
+            <a:off x="6408000" y="2934000"/>
+            <a:ext cx="2304000" cy="324000"/>
           </a:xfrm>
           <a:prstGeom prst="rect">
             <a:avLst/>
@@ -22443,69 +22271,26 @@
           <a:p>
             <a:pPr algn="l"/>
             <a:r>
-              <a:rPr sz="800" b="0" i="0">
+              <a:rPr sz="750" b="0" i="0">
                 <a:solidFill>
                   <a:srgbClr val="555555"/>
                 </a:solidFill>
               </a:rPr>
-              <a:t>Score 67/100  ·  HOLD</a:t>
-            </a:r>
-          </a:p>
-        </p:txBody>
-      </p:sp>
-      <p:sp>
-        <p:nvSpPr>
-          <p:cNvPr id="31" name="Rectangle 30"/>
-          <p:cNvSpPr/>
-          <p:nvPr/>
-        </p:nvSpPr>
-        <p:spPr>
-          <a:xfrm>
-            <a:off x="5940000" y="2500200"/>
-            <a:ext cx="180000" cy="108000"/>
-          </a:xfrm>
-          <a:prstGeom prst="rect">
-            <a:avLst/>
-          </a:prstGeom>
-          <a:solidFill>
-            <a:srgbClr val="2A5298"/>
-          </a:solidFill>
-          <a:ln>
-            <a:noFill/>
-          </a:ln>
-        </p:spPr>
-        <p:style>
-          <a:lnRef idx="1">
-            <a:schemeClr val="accent1"/>
-          </a:lnRef>
-          <a:fillRef idx="3">
-            <a:schemeClr val="accent1"/>
-          </a:fillRef>
-          <a:effectRef idx="2">
-            <a:schemeClr val="accent1"/>
-          </a:effectRef>
-          <a:fontRef idx="minor">
-            <a:schemeClr val="lt1"/>
-          </a:fontRef>
-        </p:style>
-        <p:txBody>
-          <a:bodyPr rtlCol="0" anchor="ctr"/>
-          <a:lstStyle/>
-          <a:p>
-            <a:pPr algn="ctr"/>
-          </a:p>
-        </p:txBody>
-      </p:sp>
-      <p:sp>
-        <p:nvSpPr>
-          <p:cNvPr id="32" name="TextBox 31"/>
+              <a:t>La dispersion des trajectoires reflète la bifurcation sectorielle : certains acteurs captent l'essentiel de la creation de valeur tandis que d'autres subissent des sorties de capitaux structurelles.</a:t>
+            </a:r>
+          </a:p>
+        </p:txBody>
+      </p:sp>
+      <p:sp>
+        <p:nvSpPr>
+          <p:cNvPr id="27" name="TextBox 26"/>
           <p:cNvSpPr txBox="1"/>
           <p:nvPr/>
         </p:nvSpPr>
         <p:spPr>
           <a:xfrm>
-            <a:off x="6192000" y="2456999"/>
-            <a:ext cx="2556000" cy="216000"/>
+            <a:off x="6408000" y="3366000"/>
+            <a:ext cx="2304000" cy="324000"/>
           </a:xfrm>
           <a:prstGeom prst="rect">
             <a:avLst/>
@@ -22520,497 +22305,19 @@
           <a:p>
             <a:pPr algn="l"/>
             <a:r>
-              <a:rPr sz="900" b="1" i="0">
-                <a:solidFill>
-                  <a:srgbClr val="1B3A6B"/>
+              <a:rPr sz="750" b="0" i="0">
+                <a:solidFill>
+                  <a:srgbClr val="555555"/>
                 </a:solidFill>
               </a:rPr>
-              <a:t>SLB  —  SLB N.V.</a:t>
-            </a:r>
-          </a:p>
-        </p:txBody>
-      </p:sp>
-      <p:sp>
-        <p:nvSpPr>
-          <p:cNvPr id="33" name="TextBox 32"/>
-          <p:cNvSpPr txBox="1"/>
-          <p:nvPr/>
-        </p:nvSpPr>
-        <p:spPr>
-          <a:xfrm>
-            <a:off x="6192000" y="2680200"/>
-            <a:ext cx="2556000" cy="180000"/>
-          </a:xfrm>
-          <a:prstGeom prst="rect">
-            <a:avLst/>
-          </a:prstGeom>
-          <a:noFill/>
-        </p:spPr>
-        <p:txBody>
-          <a:bodyPr wrap="square">
-            <a:spAutoFit/>
-          </a:bodyPr>
-          <a:lstStyle/>
-          <a:p>
-            <a:pPr algn="l"/>
-            <a:r>
-              <a:rPr sz="800" b="0" i="0">
-                <a:solidFill>
-                  <a:srgbClr val="555555"/>
-                </a:solidFill>
-              </a:rPr>
-              <a:t>Score 62/100  ·  HOLD</a:t>
-            </a:r>
-          </a:p>
-        </p:txBody>
-      </p:sp>
-      <p:sp>
-        <p:nvSpPr>
-          <p:cNvPr id="34" name="Rectangle 33"/>
-          <p:cNvSpPr/>
-          <p:nvPr/>
-        </p:nvSpPr>
-        <p:spPr>
-          <a:xfrm>
-            <a:off x="5940000" y="2830950"/>
-            <a:ext cx="180000" cy="108000"/>
-          </a:xfrm>
-          <a:prstGeom prst="rect">
-            <a:avLst/>
-          </a:prstGeom>
-          <a:solidFill>
-            <a:srgbClr val="6B3A1B"/>
-          </a:solidFill>
-          <a:ln>
-            <a:noFill/>
-          </a:ln>
-        </p:spPr>
-        <p:style>
-          <a:lnRef idx="1">
-            <a:schemeClr val="accent1"/>
-          </a:lnRef>
-          <a:fillRef idx="3">
-            <a:schemeClr val="accent1"/>
-          </a:fillRef>
-          <a:effectRef idx="2">
-            <a:schemeClr val="accent1"/>
-          </a:effectRef>
-          <a:fontRef idx="minor">
-            <a:schemeClr val="lt1"/>
-          </a:fontRef>
-        </p:style>
-        <p:txBody>
-          <a:bodyPr rtlCol="0" anchor="ctr"/>
-          <a:lstStyle/>
-          <a:p>
-            <a:pPr algn="ctr"/>
-          </a:p>
-        </p:txBody>
-      </p:sp>
-      <p:sp>
-        <p:nvSpPr>
-          <p:cNvPr id="35" name="TextBox 34"/>
-          <p:cNvSpPr txBox="1"/>
-          <p:nvPr/>
-        </p:nvSpPr>
-        <p:spPr>
-          <a:xfrm>
-            <a:off x="6192000" y="2787750"/>
-            <a:ext cx="2556000" cy="216000"/>
-          </a:xfrm>
-          <a:prstGeom prst="rect">
-            <a:avLst/>
-          </a:prstGeom>
-          <a:noFill/>
-        </p:spPr>
-        <p:txBody>
-          <a:bodyPr wrap="square">
-            <a:spAutoFit/>
-          </a:bodyPr>
-          <a:lstStyle/>
-          <a:p>
-            <a:pPr algn="l"/>
-            <a:r>
-              <a:rPr sz="900" b="1" i="0">
-                <a:solidFill>
-                  <a:srgbClr val="1B3A6B"/>
-                </a:solidFill>
-              </a:rPr>
-              <a:t>VLO  —  Valero Energy Corporation</a:t>
-            </a:r>
-          </a:p>
-        </p:txBody>
-      </p:sp>
-      <p:sp>
-        <p:nvSpPr>
-          <p:cNvPr id="36" name="TextBox 35"/>
-          <p:cNvSpPr txBox="1"/>
-          <p:nvPr/>
-        </p:nvSpPr>
-        <p:spPr>
-          <a:xfrm>
-            <a:off x="6192000" y="3010950"/>
-            <a:ext cx="2556000" cy="180000"/>
-          </a:xfrm>
-          <a:prstGeom prst="rect">
-            <a:avLst/>
-          </a:prstGeom>
-          <a:noFill/>
-        </p:spPr>
-        <p:txBody>
-          <a:bodyPr wrap="square">
-            <a:spAutoFit/>
-          </a:bodyPr>
-          <a:lstStyle/>
-          <a:p>
-            <a:pPr algn="l"/>
-            <a:r>
-              <a:rPr sz="800" b="0" i="0">
-                <a:solidFill>
-                  <a:srgbClr val="555555"/>
-                </a:solidFill>
-              </a:rPr>
-              <a:t>Score 54/100  ·  HOLD</a:t>
-            </a:r>
-          </a:p>
-        </p:txBody>
-      </p:sp>
-      <p:sp>
-        <p:nvSpPr>
-          <p:cNvPr id="37" name="Rectangle 36"/>
-          <p:cNvSpPr/>
-          <p:nvPr/>
-        </p:nvSpPr>
-        <p:spPr>
-          <a:xfrm>
-            <a:off x="5940000" y="3161699"/>
-            <a:ext cx="180000" cy="108000"/>
-          </a:xfrm>
-          <a:prstGeom prst="rect">
-            <a:avLst/>
-          </a:prstGeom>
-          <a:solidFill>
-            <a:srgbClr val="3A6B1B"/>
-          </a:solidFill>
-          <a:ln>
-            <a:noFill/>
-          </a:ln>
-        </p:spPr>
-        <p:style>
-          <a:lnRef idx="1">
-            <a:schemeClr val="accent1"/>
-          </a:lnRef>
-          <a:fillRef idx="3">
-            <a:schemeClr val="accent1"/>
-          </a:fillRef>
-          <a:effectRef idx="2">
-            <a:schemeClr val="accent1"/>
-          </a:effectRef>
-          <a:fontRef idx="minor">
-            <a:schemeClr val="lt1"/>
-          </a:fontRef>
-        </p:style>
-        <p:txBody>
-          <a:bodyPr rtlCol="0" anchor="ctr"/>
-          <a:lstStyle/>
-          <a:p>
-            <a:pPr algn="ctr"/>
-          </a:p>
-        </p:txBody>
-      </p:sp>
-      <p:sp>
-        <p:nvSpPr>
-          <p:cNvPr id="38" name="TextBox 37"/>
-          <p:cNvSpPr txBox="1"/>
-          <p:nvPr/>
-        </p:nvSpPr>
-        <p:spPr>
-          <a:xfrm>
-            <a:off x="6192000" y="3118500"/>
-            <a:ext cx="2556000" cy="216000"/>
-          </a:xfrm>
-          <a:prstGeom prst="rect">
-            <a:avLst/>
-          </a:prstGeom>
-          <a:noFill/>
-        </p:spPr>
-        <p:txBody>
-          <a:bodyPr wrap="square">
-            <a:spAutoFit/>
-          </a:bodyPr>
-          <a:lstStyle/>
-          <a:p>
-            <a:pPr algn="l"/>
-            <a:r>
-              <a:rPr sz="900" b="1" i="0">
-                <a:solidFill>
-                  <a:srgbClr val="1B3A6B"/>
-                </a:solidFill>
-              </a:rPr>
-              <a:t>PSX  —  Phillips 66</a:t>
-            </a:r>
-          </a:p>
-        </p:txBody>
-      </p:sp>
-      <p:sp>
-        <p:nvSpPr>
-          <p:cNvPr id="39" name="TextBox 38"/>
-          <p:cNvSpPr txBox="1"/>
-          <p:nvPr/>
-        </p:nvSpPr>
-        <p:spPr>
-          <a:xfrm>
-            <a:off x="6192000" y="3341699"/>
-            <a:ext cx="2556000" cy="180000"/>
-          </a:xfrm>
-          <a:prstGeom prst="rect">
-            <a:avLst/>
-          </a:prstGeom>
-          <a:noFill/>
-        </p:spPr>
-        <p:txBody>
-          <a:bodyPr wrap="square">
-            <a:spAutoFit/>
-          </a:bodyPr>
-          <a:lstStyle/>
-          <a:p>
-            <a:pPr algn="l"/>
-            <a:r>
-              <a:rPr sz="800" b="0" i="0">
-                <a:solidFill>
-                  <a:srgbClr val="555555"/>
-                </a:solidFill>
-              </a:rPr>
-              <a:t>Score 60/100  ·  HOLD</a:t>
-            </a:r>
-          </a:p>
-        </p:txBody>
-      </p:sp>
-      <p:sp>
-        <p:nvSpPr>
-          <p:cNvPr id="40" name="Rectangle 39"/>
-          <p:cNvSpPr/>
-          <p:nvPr/>
-        </p:nvSpPr>
-        <p:spPr>
-          <a:xfrm>
-            <a:off x="5940000" y="3492449"/>
-            <a:ext cx="180000" cy="108000"/>
-          </a:xfrm>
-          <a:prstGeom prst="rect">
-            <a:avLst/>
-          </a:prstGeom>
-          <a:solidFill>
-            <a:srgbClr val="6B1B3A"/>
-          </a:solidFill>
-          <a:ln>
-            <a:noFill/>
-          </a:ln>
-        </p:spPr>
-        <p:style>
-          <a:lnRef idx="1">
-            <a:schemeClr val="accent1"/>
-          </a:lnRef>
-          <a:fillRef idx="3">
-            <a:schemeClr val="accent1"/>
-          </a:fillRef>
-          <a:effectRef idx="2">
-            <a:schemeClr val="accent1"/>
-          </a:effectRef>
-          <a:fontRef idx="minor">
-            <a:schemeClr val="lt1"/>
-          </a:fontRef>
-        </p:style>
-        <p:txBody>
-          <a:bodyPr rtlCol="0" anchor="ctr"/>
-          <a:lstStyle/>
-          <a:p>
-            <a:pPr algn="ctr"/>
-          </a:p>
-        </p:txBody>
-      </p:sp>
-      <p:sp>
-        <p:nvSpPr>
-          <p:cNvPr id="41" name="TextBox 40"/>
-          <p:cNvSpPr txBox="1"/>
-          <p:nvPr/>
-        </p:nvSpPr>
-        <p:spPr>
-          <a:xfrm>
-            <a:off x="6192000" y="3449249"/>
-            <a:ext cx="2556000" cy="216000"/>
-          </a:xfrm>
-          <a:prstGeom prst="rect">
-            <a:avLst/>
-          </a:prstGeom>
-          <a:noFill/>
-        </p:spPr>
-        <p:txBody>
-          <a:bodyPr wrap="square">
-            <a:spAutoFit/>
-          </a:bodyPr>
-          <a:lstStyle/>
-          <a:p>
-            <a:pPr algn="l"/>
-            <a:r>
-              <a:rPr sz="900" b="1" i="0">
-                <a:solidFill>
-                  <a:srgbClr val="1B3A6B"/>
-                </a:solidFill>
-              </a:rPr>
-              <a:t>MPC  —  Marathon Petroleum Corporation</a:t>
-            </a:r>
-          </a:p>
-        </p:txBody>
-      </p:sp>
-      <p:sp>
-        <p:nvSpPr>
-          <p:cNvPr id="42" name="TextBox 41"/>
-          <p:cNvSpPr txBox="1"/>
-          <p:nvPr/>
-        </p:nvSpPr>
-        <p:spPr>
-          <a:xfrm>
-            <a:off x="6192000" y="3672449"/>
-            <a:ext cx="2556000" cy="180000"/>
-          </a:xfrm>
-          <a:prstGeom prst="rect">
-            <a:avLst/>
-          </a:prstGeom>
-          <a:noFill/>
-        </p:spPr>
-        <p:txBody>
-          <a:bodyPr wrap="square">
-            <a:spAutoFit/>
-          </a:bodyPr>
-          <a:lstStyle/>
-          <a:p>
-            <a:pPr algn="l"/>
-            <a:r>
-              <a:rPr sz="800" b="0" i="0">
-                <a:solidFill>
-                  <a:srgbClr val="555555"/>
-                </a:solidFill>
-              </a:rPr>
-              <a:t>Score 59/100  ·  HOLD</a:t>
-            </a:r>
-          </a:p>
-        </p:txBody>
-      </p:sp>
-      <p:sp>
-        <p:nvSpPr>
-          <p:cNvPr id="43" name="Rectangle 42"/>
-          <p:cNvSpPr/>
-          <p:nvPr/>
-        </p:nvSpPr>
-        <p:spPr>
-          <a:xfrm>
-            <a:off x="5903999" y="3780000"/>
-            <a:ext cx="2916000" cy="18000"/>
-          </a:xfrm>
-          <a:prstGeom prst="rect">
-            <a:avLst/>
-          </a:prstGeom>
-          <a:solidFill>
-            <a:srgbClr val="AAAAAA"/>
-          </a:solidFill>
-          <a:ln>
-            <a:noFill/>
-          </a:ln>
-        </p:spPr>
-        <p:style>
-          <a:lnRef idx="1">
-            <a:schemeClr val="accent1"/>
-          </a:lnRef>
-          <a:fillRef idx="3">
-            <a:schemeClr val="accent1"/>
-          </a:fillRef>
-          <a:effectRef idx="2">
-            <a:schemeClr val="accent1"/>
-          </a:effectRef>
-          <a:fontRef idx="minor">
-            <a:schemeClr val="lt1"/>
-          </a:fontRef>
-        </p:style>
-        <p:txBody>
-          <a:bodyPr rtlCol="0" anchor="ctr"/>
-          <a:lstStyle/>
-          <a:p>
-            <a:pPr algn="ctr"/>
-          </a:p>
-        </p:txBody>
-      </p:sp>
-      <p:sp>
-        <p:nvSpPr>
-          <p:cNvPr id="44" name="TextBox 43"/>
-          <p:cNvSpPr txBox="1"/>
-          <p:nvPr/>
-        </p:nvSpPr>
-        <p:spPr>
-          <a:xfrm>
-            <a:off x="5976000" y="3816000"/>
-            <a:ext cx="2808000" cy="180000"/>
-          </a:xfrm>
-          <a:prstGeom prst="rect">
-            <a:avLst/>
-          </a:prstGeom>
-          <a:noFill/>
-        </p:spPr>
-        <p:txBody>
-          <a:bodyPr wrap="square">
-            <a:spAutoFit/>
-          </a:bodyPr>
-          <a:lstStyle/>
-          <a:p>
-            <a:pPr algn="l"/>
-            <a:r>
-              <a:rPr sz="750" b="1" i="0">
-                <a:solidFill>
-                  <a:srgbClr val="1B3A6B"/>
-                </a:solidFill>
-              </a:rPr>
-              <a:t>LECTURE ANALYTIQUE</a:t>
-            </a:r>
-          </a:p>
-        </p:txBody>
-      </p:sp>
-      <p:sp>
-        <p:nvSpPr>
-          <p:cNvPr id="45" name="TextBox 44"/>
-          <p:cNvSpPr txBox="1"/>
-          <p:nvPr/>
-        </p:nvSpPr>
-        <p:spPr>
-          <a:xfrm>
-            <a:off x="5976000" y="4014000"/>
-            <a:ext cx="2808000" cy="612000"/>
-          </a:xfrm>
-          <a:prstGeom prst="rect">
-            <a:avLst/>
-          </a:prstGeom>
-          <a:noFill/>
-        </p:spPr>
-        <p:txBody>
-          <a:bodyPr wrap="square">
-            <a:spAutoFit/>
-          </a:bodyPr>
-          <a:lstStyle/>
-          <a:p>
-            <a:pPr algn="l"/>
-            <a:r>
-              <a:rPr sz="700" b="0" i="0">
-                <a:solidFill>
-                  <a:srgbClr val="555555"/>
-                </a:solidFill>
-              </a:rPr>
-              <a:t>Sur 52 semaines, VLO affiche la meilleure performance (+82%) tandis que EOG est en retard (+8%). La dispersion des trajectoires illustre la bifurcation sectorielle. Le momentum 52W est integre dans le score FinSight comme signal de confirmation.</a:t>
-            </a:r>
-          </a:p>
-        </p:txBody>
-      </p:sp>
-      <p:sp>
-        <p:nvSpPr>
-          <p:cNvPr id="46" name="Rectangle 45"/>
+              <a:t>Le momentum 52W est integre dans le score FinSight comme signal de confirmation de la these d'investissement.</a:t>
+            </a:r>
+          </a:p>
+        </p:txBody>
+      </p:sp>
+      <p:sp>
+        <p:nvSpPr>
+          <p:cNvPr id="28" name="Rectangle 27"/>
           <p:cNvSpPr/>
           <p:nvPr/>
         </p:nvSpPr>
@@ -23053,7 +22360,7 @@
       </p:sp>
       <p:sp>
         <p:nvSpPr>
-          <p:cNvPr id="47" name="TextBox 46"/>
+          <p:cNvPr id="29" name="TextBox 28"/>
           <p:cNvSpPr txBox="1"/>
           <p:nvPr/>
         </p:nvSpPr>

--- a/preview/secteur_Energy_S&P_500/secteur_Energy_S&P_500.pptx
+++ b/preview/secteur_Energy_S&P_500/secteur_Energy_S&P_500.pptx
@@ -4354,7 +4354,7 @@
                             <a:srgbClr val="1A1A1A"/>
                           </a:solidFill>
                         </a:rPr>
-                        <a:t>133.305</a:t>
+                        <a:t>133.24</a:t>
                       </a:r>
                     </a:p>
                   </a:txBody>
@@ -4566,7 +4566,7 @@
                             <a:srgbClr val="1A1A1A"/>
                           </a:solidFill>
                         </a:rPr>
-                        <a:t>51.265</a:t>
+                        <a:t>51.255</a:t>
                       </a:r>
                     </a:p>
                   </a:txBody>
@@ -4778,7 +4778,7 @@
                             <a:srgbClr val="1A1A1A"/>
                           </a:solidFill>
                         </a:rPr>
-                        <a:t>158.41</a:t>
+                        <a:t>158.3</a:t>
                       </a:r>
                     </a:p>
                   </a:txBody>
@@ -4990,7 +4990,7 @@
                             <a:srgbClr val="1A1A1A"/>
                           </a:solidFill>
                         </a:rPr>
-                        <a:t>224.315</a:t>
+                        <a:t>224.42</a:t>
                       </a:r>
                     </a:p>
                   </a:txBody>
@@ -5202,7 +5202,7 @@
                             <a:srgbClr val="1A1A1A"/>
                           </a:solidFill>
                         </a:rPr>
-                        <a:t>148.01</a:t>
+                        <a:t>148.055</a:t>
                       </a:r>
                     </a:p>
                   </a:txBody>
@@ -5414,7 +5414,7 @@
                             <a:srgbClr val="1A1A1A"/>
                           </a:solidFill>
                         </a:rPr>
-                        <a:t>118.66</a:t>
+                        <a:t>118.57</a:t>
                       </a:r>
                     </a:p>
                   </a:txBody>
@@ -5626,7 +5626,7 @@
                             <a:srgbClr val="1A1A1A"/>
                           </a:solidFill>
                         </a:rPr>
-                        <a:t>237.5142</a:t>
+                        <a:t>237.47</a:t>
                       </a:r>
                     </a:p>
                   </a:txBody>
@@ -5838,7 +5838,7 @@
                             <a:srgbClr val="1A1A1A"/>
                           </a:solidFill>
                         </a:rPr>
-                        <a:t>185.7203</a:t>
+                        <a:t>185.545</a:t>
                       </a:r>
                     </a:p>
                   </a:txBody>
@@ -10870,7 +10870,7 @@
                   <a:srgbClr val="555555"/>
                 </a:solidFill>
               </a:rPr>
-              <a:t>La récente hausse des prix du Brent au-dessus de 85 USD/bbl, soutenue par des tensions géopolitiques au Moyen-Orient et une demande résiliente en Asie,</a:t>
+              <a:t>Demande asiatique robuste et OPEP+ disciplinée — Brent attendu 75-85 USD/bbl en 2026.</a:t>
             </a:r>
           </a:p>
         </p:txBody>
@@ -11024,7 +11024,7 @@
                   <a:srgbClr val="555555"/>
                 </a:solidFill>
               </a:rPr>
-              <a:t>Un retournement des prix du gaz naturel ou du pétrole, lié à une récession mondiale ou à un excès d'offre, pourrait peser sur les marges.</a:t>
+              <a:t>Récession mondiale ou accord OPEP+ défavorable — Brent &lt; 60 USD/bbl entraînerait des coupes dividendes.</a:t>
             </a:r>
           </a:p>
         </p:txBody>
@@ -11887,7 +11887,7 @@
                   <a:srgbClr val="555555"/>
                 </a:solidFill>
               </a:rPr>
-              <a:t>Les majors comme SLB bénéficient de la demande croissante en technologies bas-carbone, notamment dans les énergies renouvelables et le captage de CO2.</a:t>
+              <a:t>Plans de transition des majors — allocation capex renouvelables +25 % pa.</a:t>
             </a:r>
           </a:p>
         </p:txBody>
@@ -12041,7 +12041,7 @@
                   <a:srgbClr val="555555"/>
                 </a:solidFill>
               </a:rPr>
-              <a:t>Les politiques environnementales strictes, notamment en Europe, pourraient alourdir les coûts opérationnels pour les acteurs traditionnels.</a:t>
+              <a:t>Accélération du calendrier sortie fossiles — actifs bloques en risque.</a:t>
             </a:r>
           </a:p>
         </p:txBody>
@@ -12904,7 +12904,7 @@
                   <a:srgbClr val="555555"/>
                 </a:solidFill>
               </a:rPr>
-              <a:t>Les pure players comme EOG Resources maintiennent des coûts de production compétitifs grâce à des forages optimisés dans les bassins permien et bakken.</a:t>
+              <a:t>Diversification approvisionnement post-Ukraine — primes GNL structurellement élevées.</a:t>
             </a:r>
           </a:p>
         </p:txBody>
@@ -13058,7 +13058,7 @@
                   <a:srgbClr val="555555"/>
                 </a:solidFill>
               </a:rPr>
-              <a:t>Les entreprises du secteur renouvelable, comme les acteurs de l'hydrogène, restent vulnérables aux changements de politiques fiscales.</a:t>
+              <a:t>Surcoûts et retards projets offshore wind — impact sur rendements.</a:t>
             </a:r>
           </a:p>
         </p:txBody>
@@ -14781,7 +14781,7 @@
                             <a:srgbClr val="1A1A1A"/>
                           </a:solidFill>
                         </a:rPr>
-                        <a:t>133.305</a:t>
+                        <a:t>133.24</a:t>
                       </a:r>
                     </a:p>
                   </a:txBody>
@@ -14801,7 +14801,7 @@
                             <a:srgbClr val="1A1A1A"/>
                           </a:solidFill>
                         </a:rPr>
-                        <a:t>153.3</a:t>
+                        <a:t>153.2</a:t>
                       </a:r>
                     </a:p>
                   </a:txBody>
@@ -14927,7 +14927,7 @@
                             <a:srgbClr val="1A1A1A"/>
                           </a:solidFill>
                         </a:rPr>
-                        <a:t>51.265</a:t>
+                        <a:t>51.255</a:t>
                       </a:r>
                     </a:p>
                   </a:txBody>
@@ -14949,7 +14949,7 @@
                             <a:srgbClr val="1A1A1A"/>
                           </a:solidFill>
                         </a:rPr>
-                        <a:t>59.0</a:t>
+                        <a:t>58.9</a:t>
                       </a:r>
                     </a:p>
                   </a:txBody>
@@ -15079,7 +15079,7 @@
                             <a:srgbClr val="1A1A1A"/>
                           </a:solidFill>
                         </a:rPr>
-                        <a:t>158.41</a:t>
+                        <a:t>158.3</a:t>
                       </a:r>
                     </a:p>
                   </a:txBody>
@@ -15099,7 +15099,7 @@
                             <a:srgbClr val="1A1A1A"/>
                           </a:solidFill>
                         </a:rPr>
-                        <a:t>182.2</a:t>
+                        <a:t>182.0</a:t>
                       </a:r>
                     </a:p>
                   </a:txBody>
@@ -15119,7 +15119,7 @@
                             <a:srgbClr val="1A1A1A"/>
                           </a:solidFill>
                         </a:rPr>
-                        <a:t>&lt; 150.5</a:t>
+                        <a:t>&lt; 150.4</a:t>
                       </a:r>
                     </a:p>
                   </a:txBody>
@@ -15225,7 +15225,7 @@
                             <a:srgbClr val="1A1A1A"/>
                           </a:solidFill>
                         </a:rPr>
-                        <a:t>224.315</a:t>
+                        <a:t>224.42</a:t>
                       </a:r>
                     </a:p>
                   </a:txBody>
@@ -15247,7 +15247,7 @@
                             <a:srgbClr val="1A1A1A"/>
                           </a:solidFill>
                         </a:rPr>
-                        <a:t>258.0</a:t>
+                        <a:t>258.1</a:t>
                       </a:r>
                     </a:p>
                   </a:txBody>
@@ -15269,7 +15269,7 @@
                             <a:srgbClr val="1A1A1A"/>
                           </a:solidFill>
                         </a:rPr>
-                        <a:t>&lt; 213.1</a:t>
+                        <a:t>&lt; 213.2</a:t>
                       </a:r>
                     </a:p>
                   </a:txBody>
@@ -15377,7 +15377,7 @@
                             <a:srgbClr val="1A1A1A"/>
                           </a:solidFill>
                         </a:rPr>
-                        <a:t>148.01</a:t>
+                        <a:t>148.055</a:t>
                       </a:r>
                     </a:p>
                   </a:txBody>
@@ -15397,7 +15397,7 @@
                             <a:srgbClr val="1A1A1A"/>
                           </a:solidFill>
                         </a:rPr>
-                        <a:t>170.2</a:t>
+                        <a:t>170.3</a:t>
                       </a:r>
                     </a:p>
                   </a:txBody>
@@ -15417,7 +15417,7 @@
                             <a:srgbClr val="1A1A1A"/>
                           </a:solidFill>
                         </a:rPr>
-                        <a:t>&lt; 140.6</a:t>
+                        <a:t>&lt; 140.7</a:t>
                       </a:r>
                     </a:p>
                   </a:txBody>
@@ -15523,7 +15523,7 @@
                             <a:srgbClr val="1A1A1A"/>
                           </a:solidFill>
                         </a:rPr>
-                        <a:t>118.66</a:t>
+                        <a:t>118.57</a:t>
                       </a:r>
                     </a:p>
                   </a:txBody>
@@ -15545,7 +15545,7 @@
                             <a:srgbClr val="1A1A1A"/>
                           </a:solidFill>
                         </a:rPr>
-                        <a:t>136.5</a:t>
+                        <a:t>136.4</a:t>
                       </a:r>
                     </a:p>
                   </a:txBody>
@@ -15567,7 +15567,7 @@
                             <a:srgbClr val="1A1A1A"/>
                           </a:solidFill>
                         </a:rPr>
-                        <a:t>&lt; 112.7</a:t>
+                        <a:t>&lt; 112.6</a:t>
                       </a:r>
                     </a:p>
                   </a:txBody>
@@ -15675,7 +15675,7 @@
                             <a:srgbClr val="1A1A1A"/>
                           </a:solidFill>
                         </a:rPr>
-                        <a:t>237.5142</a:t>
+                        <a:t>237.47</a:t>
                       </a:r>
                     </a:p>
                   </a:txBody>
@@ -15821,7 +15821,7 @@
                             <a:srgbClr val="1A1A1A"/>
                           </a:solidFill>
                         </a:rPr>
-                        <a:t>185.7203</a:t>
+                        <a:t>185.545</a:t>
                       </a:r>
                     </a:p>
                   </a:txBody>
@@ -15843,7 +15843,7 @@
                             <a:srgbClr val="1A1A1A"/>
                           </a:solidFill>
                         </a:rPr>
-                        <a:t>213.6</a:t>
+                        <a:t>213.4</a:t>
                       </a:r>
                     </a:p>
                   </a:txBody>
@@ -15865,7 +15865,7 @@
                             <a:srgbClr val="1A1A1A"/>
                           </a:solidFill>
                         </a:rPr>
-                        <a:t>&lt; 176.4</a:t>
+                        <a:t>&lt; 176.3</a:t>
                       </a:r>
                     </a:p>
                   </a:txBody>
@@ -17024,7 +17024,7 @@
                   <a:srgbClr val="FFFFFF"/>
                 </a:solidFill>
               </a:rPr>
-              <a:t>Volatilité des matières premières</a:t>
+              <a:t>Volatilite Petrole</a:t>
             </a:r>
           </a:p>
         </p:txBody>
@@ -17058,7 +17058,7 @@
                   <a:srgbClr val="555555"/>
                 </a:solidFill>
               </a:rPr>
-              <a:t>Un retournement des prix du gaz naturel ou du pétrole, lié à une récession mondiale ou à un excès d'offre, pourrait peser sur les marges.</a:t>
+              <a:t>Récession mondiale ou accord OPEP+ défavorable — Brent &lt; 60 USD/bbl entraînerait des coupes dividendes.</a:t>
             </a:r>
           </a:p>
         </p:txBody>
@@ -17178,7 +17178,7 @@
                   <a:srgbClr val="FFFFFF"/>
                 </a:solidFill>
               </a:rPr>
-              <a:t>Réglementation climatique</a:t>
+              <a:t>Transition Réglementaire</a:t>
             </a:r>
           </a:p>
         </p:txBody>
@@ -17212,7 +17212,7 @@
                   <a:srgbClr val="555555"/>
                 </a:solidFill>
               </a:rPr>
-              <a:t>Les politiques environnementales strictes, notamment en Europe, pourraient alourdir les coûts opérationnels pour les acteurs traditionnels.</a:t>
+              <a:t>Accélération du calendrier sortie fossiles — actifs bloques en risque.</a:t>
             </a:r>
           </a:p>
         </p:txBody>
@@ -17332,7 +17332,7 @@
                   <a:srgbClr val="FFFFFF"/>
                 </a:solidFill>
               </a:rPr>
-              <a:t>Dépendance aux subventions</a:t>
+              <a:t>Capex Renouvelable</a:t>
             </a:r>
           </a:p>
         </p:txBody>
@@ -17366,7 +17366,7 @@
                   <a:srgbClr val="555555"/>
                 </a:solidFill>
               </a:rPr>
-              <a:t>Les entreprises du secteur renouvelable, comme les acteurs de l'hydrogène, restent vulnérables aux changements de politiques fiscales.</a:t>
+              <a:t>Surcoûts et retards projets offshore wind — impact sur rendements.</a:t>
             </a:r>
           </a:p>
         </p:txBody>
@@ -19619,7 +19619,7 @@
                   <a:srgbClr val="555555"/>
                 </a:solidFill>
               </a:rPr>
-              <a:t>+ Dynamique des prix du pétrole — La récente hausse des prix du Brent au-dessus de 85 USD/bbl, soutenue par des tensions</a:t>
+              <a:t>+ Prix Petrole Soutenu — Demande asiatique robuste et OPEP+ disciplinée — Brent attendu 75-85 USD/bbl en 2026.</a:t>
             </a:r>
           </a:p>
         </p:txBody>
@@ -19739,7 +19739,7 @@
                   <a:srgbClr val="555555"/>
                 </a:solidFill>
               </a:rPr>
-              <a:t>- Volatilité des matières premières — Un retournement des prix du gaz naturel ou du pétrole, lié à une récession mondiale ou à</a:t>
+              <a:t>- Volatilite Petrole — Récession mondiale ou accord OPEP+ défavorable — Brent &lt; 60 USD/bbl entraînerait des</a:t>
             </a:r>
           </a:p>
         </p:txBody>
@@ -20835,7 +20835,7 @@
                   <a:srgbClr val="1B3A6B"/>
                 </a:solidFill>
               </a:rPr>
-              <a:t>Dynamique des prix du pétrole</a:t>
+              <a:t>Prix Petrole Soutenu</a:t>
             </a:r>
           </a:p>
         </p:txBody>
@@ -20869,7 +20869,7 @@
                   <a:srgbClr val="555555"/>
                 </a:solidFill>
               </a:rPr>
-              <a:t>La récente hausse des prix du Brent au-dessus de 85 USD/bbl, soutenue par des tensions géopolitiques au Moyen-Orient et une demande résiliente en Asie, pourrait relancer les investissements upstream.</a:t>
+              <a:t>Demande asiatique robuste et OPEP+ disciplinée — Brent attendu 75-85 USD/bbl en 2026.</a:t>
             </a:r>
           </a:p>
         </p:txBody>
@@ -20989,7 +20989,7 @@
                   <a:srgbClr val="1B3A6B"/>
                 </a:solidFill>
               </a:rPr>
-              <a:t>Transition énergétique</a:t>
+              <a:t>Investissements Renouvelables</a:t>
             </a:r>
           </a:p>
         </p:txBody>
@@ -21023,7 +21023,7 @@
                   <a:srgbClr val="555555"/>
                 </a:solidFill>
               </a:rPr>
-              <a:t>Les majors comme SLB bénéficient de la demande croissante en technologies bas-carbone, notamment dans les énergies renouvelables et le captage de CO2.</a:t>
+              <a:t>Plans de transition des majors — allocation capex renouvelables +25 % pa.</a:t>
             </a:r>
           </a:p>
         </p:txBody>
@@ -21143,7 +21143,7 @@
                   <a:srgbClr val="1B3A6B"/>
                 </a:solidFill>
               </a:rPr>
-              <a:t>Efficacité opérationnelle</a:t>
+              <a:t>GNL Européen</a:t>
             </a:r>
           </a:p>
         </p:txBody>
@@ -21177,7 +21177,7 @@
                   <a:srgbClr val="555555"/>
                 </a:solidFill>
               </a:rPr>
-              <a:t>Les pure players comme EOG Resources maintiennent des coûts de production compétitifs grâce à des forages optimisés dans les bassins permien et bakken.</a:t>
+              <a:t>Diversification approvisionnement post-Ukraine — primes GNL structurellement élevées.</a:t>
             </a:r>
           </a:p>
         </p:txBody>
@@ -21374,7 +21374,7 @@
                   <a:srgbClr val="A82020"/>
                 </a:solidFill>
               </a:rPr>
-              <a:t>Volatilité des matières premières</a:t>
+              <a:t>Volatilite Petrole</a:t>
             </a:r>
           </a:p>
         </p:txBody>
@@ -21408,7 +21408,7 @@
                   <a:srgbClr val="555555"/>
                 </a:solidFill>
               </a:rPr>
-              <a:t>Un retournement des prix du gaz naturel ou du pétrole, lié à une récession mondiale ou à un excès d'offre, pourrait peser sur les marges.</a:t>
+              <a:t>Récession mondiale ou accord OPEP+ défavorable — Brent &lt; 60 USD/bbl entraînerait des coupes dividendes.</a:t>
             </a:r>
           </a:p>
         </p:txBody>
@@ -21528,7 +21528,7 @@
                   <a:srgbClr val="A82020"/>
                 </a:solidFill>
               </a:rPr>
-              <a:t>Réglementation climatique</a:t>
+              <a:t>Transition Réglementaire</a:t>
             </a:r>
           </a:p>
         </p:txBody>
@@ -21562,7 +21562,7 @@
                   <a:srgbClr val="555555"/>
                 </a:solidFill>
               </a:rPr>
-              <a:t>Les politiques environnementales strictes, notamment en Europe, pourraient alourdir les coûts opérationnels pour les acteurs traditionnels.</a:t>
+              <a:t>Accélération du calendrier sortie fossiles — actifs bloques en risque.</a:t>
             </a:r>
           </a:p>
         </p:txBody>
@@ -21682,7 +21682,7 @@
                   <a:srgbClr val="A82020"/>
                 </a:solidFill>
               </a:rPr>
-              <a:t>Dépendance aux subventions</a:t>
+              <a:t>Capex Renouvelable</a:t>
             </a:r>
           </a:p>
         </p:txBody>
@@ -21716,7 +21716,7 @@
                   <a:srgbClr val="555555"/>
                 </a:solidFill>
               </a:rPr>
-              <a:t>Les entreprises du secteur renouvelable, comme les acteurs de l'hydrogène, restent vulnérables aux changements de politiques fiscales.</a:t>
+              <a:t>Surcoûts et retards projets offshore wind — impact sur rendements.</a:t>
             </a:r>
           </a:p>
         </p:txBody>
@@ -27472,7 +27472,7 @@
                   <a:srgbClr val="555555"/>
                 </a:solidFill>
               </a:rPr>
-              <a:t>Le secteur Energy affiche une valorisation médiane EV/EBITDA de 11.1x, en ligne avec les moyennes historiques post-pandémie, reflétant une stabilisation des marges EBITDA à 19.4% malgré une croissance des revenus négative de -1.2% sur un an, signe d'une maturité relative du cycle.</a:t>
+              <a:t>Le secteur Énergie couvre les majors petrolieres et gazieres, les énergies renouvelables et les services parapetroliers. Il reste marque par la volatilité des prix des matières premières, tout en beneficiant de la transition énergétique.</a:t>
             </a:r>
           </a:p>
         </p:txBody>
@@ -27669,7 +27669,7 @@
                   <a:srgbClr val="1B3A6B"/>
                 </a:solidFill>
               </a:rPr>
-              <a:t>Dynamique des prix du pétrole</a:t>
+              <a:t>Prix Petrole Soutenu</a:t>
             </a:r>
           </a:p>
         </p:txBody>
@@ -27703,7 +27703,7 @@
                   <a:srgbClr val="555555"/>
                 </a:solidFill>
               </a:rPr>
-              <a:t>La récente hausse des prix du Brent au-dessus de 85 USD/bbl, soutenue par des tensions géopolitiques au Moyen-Orient et une demande résiliente en Asie, pourrait relancer les investissements upstream.</a:t>
+              <a:t>Demande asiatique robuste et OPEP+ disciplinée — Brent attendu 75-85 USD/bbl en 2026.</a:t>
             </a:r>
           </a:p>
         </p:txBody>
@@ -27780,7 +27780,7 @@
                   <a:srgbClr val="1B3A6B"/>
                 </a:solidFill>
               </a:rPr>
-              <a:t>Transition énergétique</a:t>
+              <a:t>Investissements Renouvelables</a:t>
             </a:r>
           </a:p>
         </p:txBody>
@@ -27814,7 +27814,7 @@
                   <a:srgbClr val="555555"/>
                 </a:solidFill>
               </a:rPr>
-              <a:t>Les majors comme SLB bénéficient de la demande croissante en technologies bas-carbone, notamment dans les énergies renouvelables et le captage de CO2.</a:t>
+              <a:t>Plans de transition des majors — allocation capex renouvelables +25 % pa.</a:t>
             </a:r>
           </a:p>
         </p:txBody>
@@ -27891,7 +27891,7 @@
                   <a:srgbClr val="1B3A6B"/>
                 </a:solidFill>
               </a:rPr>
-              <a:t>Efficacité opérationnelle</a:t>
+              <a:t>GNL Européen</a:t>
             </a:r>
           </a:p>
         </p:txBody>
@@ -27925,7 +27925,7 @@
                   <a:srgbClr val="555555"/>
                 </a:solidFill>
               </a:rPr>
-              <a:t>Les pure players comme EOG Resources maintiennent des coûts de production compétitifs grâce à des forages optimisés dans les bassins permien et bakken.</a:t>
+              <a:t>Diversification approvisionnement post-Ukraine — primes GNL structurellement élevées.</a:t>
             </a:r>
           </a:p>
         </p:txBody>
@@ -30304,7 +30304,7 @@
                             <a:srgbClr val="1A1A1A"/>
                           </a:solidFill>
                         </a:rPr>
-                        <a:t>28.0x</a:t>
+                        <a:t>27.9x</a:t>
                       </a:r>
                     </a:p>
                   </a:txBody>
@@ -30454,7 +30454,7 @@
                             <a:srgbClr val="1A1A1A"/>
                           </a:solidFill>
                         </a:rPr>
-                        <a:t>20.3x</a:t>
+                        <a:t>20.2x</a:t>
                       </a:r>
                     </a:p>
                   </a:txBody>
@@ -31421,7 +31421,7 @@
                   <a:srgbClr val="1B3A6B"/>
                 </a:solidFill>
               </a:rPr>
-              <a:t>Prix des énergies fossiles</a:t>
+              <a:t>Prix Hydrocarbures</a:t>
             </a:r>
           </a:p>
         </p:txBody>
@@ -31455,7 +31455,7 @@
                   <a:srgbClr val="555555"/>
                 </a:solidFill>
               </a:rPr>
-              <a:t>Une hausse durable des prix du pétrole ou du gaz, combinée à une demande structurelle en Asie, pourrait booster les valorisations des E&amp;P comme EOG Resources.</a:t>
+              <a:t>OPEP+ discipline — soutien structurel des prix 2026</a:t>
             </a:r>
           </a:p>
         </p:txBody>
@@ -31609,7 +31609,7 @@
                   <a:srgbClr val="1B3A6B"/>
                 </a:solidFill>
               </a:rPr>
-              <a:t>Investissements ESG</a:t>
+              <a:t>GNL &amp; Souveraineté</a:t>
             </a:r>
           </a:p>
         </p:txBody>
@@ -31643,7 +31643,7 @@
                   <a:srgbClr val="555555"/>
                 </a:solidFill>
               </a:rPr>
-              <a:t>Les fonds dédiés à la transition énergétique pourraient surpondérer les acteurs bien positionnés comme SLB, tirant les multiples vers le haut.</a:t>
+              <a:t>Diversification approvisionnement EU — prime GNL persistante</a:t>
             </a:r>
           </a:p>
         </p:txBody>
@@ -31797,7 +31797,7 @@
                   <a:srgbClr val="1B3A6B"/>
                 </a:solidFill>
               </a:rPr>
-              <a:t>Surcapacité de raffinage</a:t>
+              <a:t>Transition Énergétique</a:t>
             </a:r>
           </a:p>
         </p:txBody>
@@ -31831,7 +31831,7 @@
                   <a:srgbClr val="555555"/>
                 </a:solidFill>
               </a:rPr>
-              <a:t>Un excès de capacité dans le raffinage, notamment aux États-Unis, pourrait exercer une pression baissière sur les marges des acteurs comme PSX.</a:t>
+              <a:t>Pression réglementaire et ESG — prime de risque croissanté</a:t>
             </a:r>
           </a:p>
         </p:txBody>
@@ -31985,7 +31985,7 @@
                   <a:srgbClr val="1B3A6B"/>
                 </a:solidFill>
               </a:rPr>
-              <a:t>Ralentissement économique</a:t>
+              <a:t>Capex Renouvelable</a:t>
             </a:r>
           </a:p>
         </p:txBody>
@@ -32019,7 +32019,7 @@
                   <a:srgbClr val="555555"/>
                 </a:solidFill>
               </a:rPr>
-              <a:t>Un ralentissement de la croissance mondiale, en particulier en Chine, réduirait la demande en produits pétroliers et gaziers, impactant les revenus.</a:t>
+              <a:t>Dépenses investissement renouvelables pesent sur FCF</a:t>
             </a:r>
           </a:p>
         </p:txBody>
@@ -32343,7 +32343,7 @@
                   <a:srgbClr val="2A5298"/>
                 </a:solidFill>
               </a:rPr>
-              <a:t>Le secteur semble en phase de maturité avancée, avec des signaux mitigés entre une demande résiliente pour les énergies fossiles et une transition vers des modèles bas-carbone encore en cours de consolidation.</a:t>
+              <a:t>Secteur en transition | dividendes élevés, visibilité long terme réduite</a:t>
             </a:r>
           </a:p>
         </p:txBody>
